--- a/(3.5) 프로빌더.pptx
+++ b/(3.5) 프로빌더.pptx
@@ -123,6 +123,35 @@
 </p:presentation>
 </file>
 
+<file path=ppt/changesInfos/changesInfo1.xml><?xml version="1.0" encoding="utf-8"?>
+<pc:chgInfo xmlns:a="http://schemas.openxmlformats.org/drawingml/2006/main" xmlns:r="http://schemas.openxmlformats.org/officeDocument/2006/relationships" xmlns:ac="http://schemas.microsoft.com/office/drawing/2013/main/command" xmlns:pc="http://schemas.microsoft.com/office/powerpoint/2013/main/command">
+  <pc:docChgLst>
+    <pc:chgData name="musukie52@gmail.com" userId="017bd91f96aa8751" providerId="LiveId" clId="{5B2C3894-F97E-4CAB-8812-5BB4D83AAC6A}"/>
+    <pc:docChg chg="custSel modSld">
+      <pc:chgData name="musukie52@gmail.com" userId="017bd91f96aa8751" providerId="LiveId" clId="{5B2C3894-F97E-4CAB-8812-5BB4D83AAC6A}" dt="2026-03-06T05:07:29.387" v="80" actId="20577"/>
+      <pc:docMkLst>
+        <pc:docMk/>
+      </pc:docMkLst>
+      <pc:sldChg chg="modSp mod">
+        <pc:chgData name="musukie52@gmail.com" userId="017bd91f96aa8751" providerId="LiveId" clId="{5B2C3894-F97E-4CAB-8812-5BB4D83AAC6A}" dt="2026-03-06T05:07:29.387" v="80" actId="20577"/>
+        <pc:sldMkLst>
+          <pc:docMk/>
+          <pc:sldMk cId="3794082438" sldId="265"/>
+        </pc:sldMkLst>
+        <pc:spChg chg="mod">
+          <ac:chgData name="musukie52@gmail.com" userId="017bd91f96aa8751" providerId="LiveId" clId="{5B2C3894-F97E-4CAB-8812-5BB4D83AAC6A}" dt="2026-03-06T05:07:29.387" v="80" actId="20577"/>
+          <ac:spMkLst>
+            <pc:docMk/>
+            <pc:sldMk cId="3794082438" sldId="265"/>
+            <ac:spMk id="3" creationId="{99C1A65D-69A9-7B15-37B1-1B6ECFA1AECF}"/>
+          </ac:spMkLst>
+        </pc:spChg>
+      </pc:sldChg>
+    </pc:docChg>
+  </pc:docChgLst>
+</pc:chgInfo>
+</file>
+
 <file path=ppt/slideLayouts/slideLayout1.xml><?xml version="1.0" encoding="utf-8"?>
 <p:sldLayout xmlns:a="http://schemas.openxmlformats.org/drawingml/2006/main" xmlns:r="http://schemas.openxmlformats.org/officeDocument/2006/relationships" xmlns:p="http://schemas.openxmlformats.org/presentationml/2006/main" type="title" preserve="1">
   <p:cSld name="제목 슬라이드">
@@ -270,7 +299,7 @@
           <a:p>
             <a:fld id="{00E914EC-232B-4893-9D71-8AE9FA753384}" type="datetimeFigureOut">
               <a:rPr lang="ko-KR" altLang="en-US" smtClean="0"/>
-              <a:t>2026-03-05</a:t>
+              <a:t>2026-03-06</a:t>
             </a:fld>
             <a:endParaRPr lang="ko-KR" altLang="en-US"/>
           </a:p>
@@ -468,7 +497,7 @@
           <a:p>
             <a:fld id="{00E914EC-232B-4893-9D71-8AE9FA753384}" type="datetimeFigureOut">
               <a:rPr lang="ko-KR" altLang="en-US" smtClean="0"/>
-              <a:t>2026-03-05</a:t>
+              <a:t>2026-03-06</a:t>
             </a:fld>
             <a:endParaRPr lang="ko-KR" altLang="en-US"/>
           </a:p>
@@ -676,7 +705,7 @@
           <a:p>
             <a:fld id="{00E914EC-232B-4893-9D71-8AE9FA753384}" type="datetimeFigureOut">
               <a:rPr lang="ko-KR" altLang="en-US" smtClean="0"/>
-              <a:t>2026-03-05</a:t>
+              <a:t>2026-03-06</a:t>
             </a:fld>
             <a:endParaRPr lang="ko-KR" altLang="en-US"/>
           </a:p>
@@ -874,7 +903,7 @@
           <a:p>
             <a:fld id="{00E914EC-232B-4893-9D71-8AE9FA753384}" type="datetimeFigureOut">
               <a:rPr lang="ko-KR" altLang="en-US" smtClean="0"/>
-              <a:t>2026-03-05</a:t>
+              <a:t>2026-03-06</a:t>
             </a:fld>
             <a:endParaRPr lang="ko-KR" altLang="en-US"/>
           </a:p>
@@ -1149,7 +1178,7 @@
           <a:p>
             <a:fld id="{00E914EC-232B-4893-9D71-8AE9FA753384}" type="datetimeFigureOut">
               <a:rPr lang="ko-KR" altLang="en-US" smtClean="0"/>
-              <a:t>2026-03-05</a:t>
+              <a:t>2026-03-06</a:t>
             </a:fld>
             <a:endParaRPr lang="ko-KR" altLang="en-US"/>
           </a:p>
@@ -1414,7 +1443,7 @@
           <a:p>
             <a:fld id="{00E914EC-232B-4893-9D71-8AE9FA753384}" type="datetimeFigureOut">
               <a:rPr lang="ko-KR" altLang="en-US" smtClean="0"/>
-              <a:t>2026-03-05</a:t>
+              <a:t>2026-03-06</a:t>
             </a:fld>
             <a:endParaRPr lang="ko-KR" altLang="en-US"/>
           </a:p>
@@ -1826,7 +1855,7 @@
           <a:p>
             <a:fld id="{00E914EC-232B-4893-9D71-8AE9FA753384}" type="datetimeFigureOut">
               <a:rPr lang="ko-KR" altLang="en-US" smtClean="0"/>
-              <a:t>2026-03-05</a:t>
+              <a:t>2026-03-06</a:t>
             </a:fld>
             <a:endParaRPr lang="ko-KR" altLang="en-US"/>
           </a:p>
@@ -1967,7 +1996,7 @@
           <a:p>
             <a:fld id="{00E914EC-232B-4893-9D71-8AE9FA753384}" type="datetimeFigureOut">
               <a:rPr lang="ko-KR" altLang="en-US" smtClean="0"/>
-              <a:t>2026-03-05</a:t>
+              <a:t>2026-03-06</a:t>
             </a:fld>
             <a:endParaRPr lang="ko-KR" altLang="en-US"/>
           </a:p>
@@ -2080,7 +2109,7 @@
           <a:p>
             <a:fld id="{00E914EC-232B-4893-9D71-8AE9FA753384}" type="datetimeFigureOut">
               <a:rPr lang="ko-KR" altLang="en-US" smtClean="0"/>
-              <a:t>2026-03-05</a:t>
+              <a:t>2026-03-06</a:t>
             </a:fld>
             <a:endParaRPr lang="ko-KR" altLang="en-US"/>
           </a:p>
@@ -2391,7 +2420,7 @@
           <a:p>
             <a:fld id="{00E914EC-232B-4893-9D71-8AE9FA753384}" type="datetimeFigureOut">
               <a:rPr lang="ko-KR" altLang="en-US" smtClean="0"/>
-              <a:t>2026-03-05</a:t>
+              <a:t>2026-03-06</a:t>
             </a:fld>
             <a:endParaRPr lang="ko-KR" altLang="en-US"/>
           </a:p>
@@ -2679,7 +2708,7 @@
           <a:p>
             <a:fld id="{00E914EC-232B-4893-9D71-8AE9FA753384}" type="datetimeFigureOut">
               <a:rPr lang="ko-KR" altLang="en-US" smtClean="0"/>
-              <a:t>2026-03-05</a:t>
+              <a:t>2026-03-06</a:t>
             </a:fld>
             <a:endParaRPr lang="ko-KR" altLang="en-US"/>
           </a:p>
@@ -2920,7 +2949,7 @@
           <a:p>
             <a:fld id="{00E914EC-232B-4893-9D71-8AE9FA753384}" type="datetimeFigureOut">
               <a:rPr lang="ko-KR" altLang="en-US" smtClean="0"/>
-              <a:t>2026-03-05</a:t>
+              <a:t>2026-03-06</a:t>
             </a:fld>
             <a:endParaRPr lang="ko-KR" altLang="en-US"/>
           </a:p>
@@ -6291,7 +6320,7 @@
         <p:spPr/>
         <p:txBody>
           <a:bodyPr>
-            <a:normAutofit lnSpcReduction="10000"/>
+            <a:normAutofit fontScale="92500" lnSpcReduction="10000"/>
           </a:bodyPr>
           <a:lstStyle/>
           <a:p>
@@ -6311,6 +6340,22 @@
               <a:rPr lang="en-US" altLang="ko-KR" dirty="0"/>
               <a:t>.</a:t>
             </a:r>
+            <a:br>
+              <a:rPr lang="en-US" altLang="ko-KR" dirty="0"/>
+            </a:br>
+            <a:r>
+              <a:rPr lang="ko-KR" altLang="en-US" dirty="0"/>
+              <a:t>즉</a:t>
+            </a:r>
+            <a:r>
+              <a:rPr lang="en-US" altLang="ko-KR" dirty="0"/>
+              <a:t>, </a:t>
+            </a:r>
+            <a:r>
+              <a:rPr lang="ko-KR" altLang="en-US"/>
+              <a:t>도형의 명암을 부드럽게 처리하는 기능</a:t>
+            </a:r>
+            <a:endParaRPr lang="en-US" altLang="ko-KR" dirty="0"/>
           </a:p>
           <a:p>
             <a:r>
